--- a/plugins/gradient-cio/assets/examples/gradient-portfolio-review.pptx
+++ b/plugins/gradient-cio/assets/examples/gradient-portfolio-review.pptx
@@ -40471,7 +40471,7 @@
                         <a:rPr>
                           <a:latin typeface="Inter"/>
                         </a:rPr>
-                        <a:t>Portfolio chart packs</a:t>
+                        <a:t>Portfolio exposure analytics</a:t>
                       </a:r>
                     </a:p>
                   </a:txBody>
@@ -40525,7 +40525,7 @@
                         <a:rPr>
                           <a:latin typeface="Inter"/>
                         </a:rPr>
-                        <a:t>allocations and commitments [S7]</a:t>
+                        <a:t>factor/currency, risk, pacing and liquidity includes [S7]</a:t>
                       </a:r>
                     </a:p>
                   </a:txBody>
@@ -43376,7 +43376,7 @@
                         <a:rPr>
                           <a:latin typeface="Inter"/>
                         </a:rPr>
-                        <a:t>Portfolio chart packs</a:t>
+                        <a:t>Portfolio exposure analytics</a:t>
                       </a:r>
                     </a:p>
                   </a:txBody>
@@ -43430,7 +43430,7 @@
                         <a:rPr>
                           <a:latin typeface="Inter"/>
                         </a:rPr>
-                        <a:t>get_chart_data</a:t>
+                        <a:t>get_portfolio_exposure</a:t>
                       </a:r>
                     </a:p>
                   </a:txBody>
@@ -43457,7 +43457,7 @@
                         <a:rPr>
                           <a:latin typeface="Inter"/>
                         </a:rPr>
-                        <a:t>allocations, commitments</a:t>
+                        <a:t>include=factor_currency_exposure, risk_contribution, commitment_pacing, liquidity_scorecard</a:t>
                       </a:r>
                     </a:p>
                   </a:txBody>
@@ -44165,7 +44165,7 @@
                         <a:rPr>
                           <a:latin typeface="Inter"/>
                         </a:rPr>
-                        <a:t>get_cross_domain_research</a:t>
+                        <a:t>get_portfolio_exposure</a:t>
                       </a:r>
                     </a:p>
                   </a:txBody>
@@ -44192,7 +44192,7 @@
                         <a:rPr>
                           <a:latin typeface="Inter"/>
                         </a:rPr>
-                        <a:t>portfolio_13f_lookthrough</a:t>
+                        <a:t>include=lookthrough_13f</a:t>
                       </a:r>
                     </a:p>
                   </a:txBody>
@@ -46274,7 +46274,7 @@
                         <a:rPr>
                           <a:latin typeface="Inter"/>
                         </a:rPr>
-                        <a:t>Expected-statistics and allocation chart packs</a:t>
+                        <a:t>Governed policy/CMA evidence and exposure includes</a:t>
                       </a:r>
                     </a:p>
                   </a:txBody>
